--- a/presentation_review_latest.pptx
+++ b/presentation_review_latest.pptx
@@ -3596,7 +3596,7 @@
               </a:defRPr>
             </a:pPr>
             <a:r>
-              <a:t>March 05, 2026</a:t>
+              <a:t>March 06, 2026</a:t>
             </a:r>
           </a:p>
         </p:txBody>
